--- a/PPTs/01_Experiment_01_ExpressJS_Routing_HTTP_Methods_and_Middleware.pptx
+++ b/PPTs/01_Experiment_01_ExpressJS_Routing_HTTP_Methods_and_Middleware.pptx
@@ -13,7 +13,6 @@
     <p:sldId id="261" r:id="rId12"/>
     <p:sldId id="262" r:id="rId13"/>
     <p:sldId id="263" r:id="rId14"/>
-    <p:sldId id="264" r:id="rId15"/>
   </p:sldIdLst>
   <p:sldSz cx="12191695" cy="6858000" type="screen4x3"/>
   <p:notesSz cx="6858000" cy="9144000"/>
@@ -3431,8 +3430,8 @@
         </p:nvSpPr>
         <p:spPr>
           <a:xfrm>
-            <a:off x="1874519" y="356616"/>
-            <a:ext cx="9326880" cy="365760"/>
+            <a:off x="777240" y="1417320"/>
+            <a:ext cx="292608" cy="365760"/>
           </a:xfrm>
           <a:prstGeom prst="rect">
             <a:avLst/>
@@ -3446,15 +3445,15 @@
           <a:lstStyle/>
           <a:p>
             <a:pPr algn="l">
-              <a:defRPr sz="1300" b="0">
-                <a:solidFill>
-                  <a:srgbClr val="666E7A"/>
+              <a:defRPr sz="2200" b="1">
+                <a:solidFill>
+                  <a:srgbClr val="305D9C"/>
                 </a:solidFill>
                 <a:latin typeface="Aptos"/>
               </a:defRPr>
             </a:pPr>
             <a:r>
-              <a:t>Part 1</a:t>
+              <a:t>•</a:t>
             </a:r>
           </a:p>
         </p:txBody>
@@ -3467,8 +3466,8 @@
         </p:nvSpPr>
         <p:spPr>
           <a:xfrm>
-            <a:off x="777240" y="1417320"/>
-            <a:ext cx="292608" cy="365760"/>
+            <a:off x="1115568" y="1408176"/>
+            <a:ext cx="10241280" cy="384048"/>
           </a:xfrm>
           <a:prstGeom prst="rect">
             <a:avLst/>
@@ -3482,339 +3481,15 @@
           <a:lstStyle/>
           <a:p>
             <a:pPr algn="l">
-              <a:defRPr sz="2200" b="1">
-                <a:solidFill>
-                  <a:srgbClr val="305D9C"/>
+              <a:defRPr sz="1800" b="0">
+                <a:solidFill>
+                  <a:srgbClr val="23272F"/>
                 </a:solidFill>
                 <a:latin typeface="Aptos"/>
               </a:defRPr>
             </a:pPr>
             <a:r>
-              <a:t>•</a:t>
-            </a:r>
-          </a:p>
-        </p:txBody>
-      </p:sp>
-      <p:sp>
-        <p:nvSpPr>
-          <p:cNvPr id="7" name="TextBox 6"/>
-          <p:cNvSpPr txBox="1"/>
-          <p:nvPr/>
-        </p:nvSpPr>
-        <p:spPr>
-          <a:xfrm>
-            <a:off x="1115568" y="1408176"/>
-            <a:ext cx="10241280" cy="384048"/>
-          </a:xfrm>
-          <a:prstGeom prst="rect">
-            <a:avLst/>
-          </a:prstGeom>
-          <a:noFill/>
-        </p:spPr>
-        <p:txBody>
-          <a:bodyPr wrap="square" lIns="45720" rIns="45720" tIns="27432" bIns="27432" anchor="t">
-            <a:spAutoFit/>
-          </a:bodyPr>
-          <a:lstStyle/>
-          <a:p>
-            <a:pPr algn="l">
-              <a:defRPr sz="1800" b="0">
-                <a:solidFill>
-                  <a:srgbClr val="23272F"/>
-                </a:solidFill>
-                <a:latin typeface="Aptos"/>
-              </a:defRPr>
-            </a:pPr>
-            <a:r>
-              <a:t>Start an Express server on port 3001.</a:t>
-            </a:r>
-          </a:p>
-        </p:txBody>
-      </p:sp>
-      <p:sp>
-        <p:nvSpPr>
-          <p:cNvPr id="8" name="TextBox 7"/>
-          <p:cNvSpPr txBox="1"/>
-          <p:nvPr/>
-        </p:nvSpPr>
-        <p:spPr>
-          <a:xfrm>
-            <a:off x="777240" y="2057400"/>
-            <a:ext cx="292608" cy="365760"/>
-          </a:xfrm>
-          <a:prstGeom prst="rect">
-            <a:avLst/>
-          </a:prstGeom>
-          <a:noFill/>
-        </p:spPr>
-        <p:txBody>
-          <a:bodyPr wrap="square" lIns="45720" rIns="45720" tIns="27432" bIns="27432" anchor="t">
-            <a:spAutoFit/>
-          </a:bodyPr>
-          <a:lstStyle/>
-          <a:p>
-            <a:pPr algn="l">
-              <a:defRPr sz="2200" b="1">
-                <a:solidFill>
-                  <a:srgbClr val="305D9C"/>
-                </a:solidFill>
-                <a:latin typeface="Aptos"/>
-              </a:defRPr>
-            </a:pPr>
-            <a:r>
-              <a:t>•</a:t>
-            </a:r>
-          </a:p>
-        </p:txBody>
-      </p:sp>
-      <p:sp>
-        <p:nvSpPr>
-          <p:cNvPr id="9" name="TextBox 8"/>
-          <p:cNvSpPr txBox="1"/>
-          <p:nvPr/>
-        </p:nvSpPr>
-        <p:spPr>
-          <a:xfrm>
-            <a:off x="1115568" y="2048256"/>
-            <a:ext cx="10241280" cy="384048"/>
-          </a:xfrm>
-          <a:prstGeom prst="rect">
-            <a:avLst/>
-          </a:prstGeom>
-          <a:noFill/>
-        </p:spPr>
-        <p:txBody>
-          <a:bodyPr wrap="square" lIns="45720" rIns="45720" tIns="27432" bIns="27432" anchor="t">
-            <a:spAutoFit/>
-          </a:bodyPr>
-          <a:lstStyle/>
-          <a:p>
-            <a:pPr algn="l">
-              <a:defRPr sz="1800" b="0">
-                <a:solidFill>
-                  <a:srgbClr val="23272F"/>
-                </a:solidFill>
-                <a:latin typeface="Aptos"/>
-              </a:defRPr>
-            </a:pPr>
-            <a:r>
-              <a:t>Use custom middleware to log requests.</a:t>
-            </a:r>
-          </a:p>
-        </p:txBody>
-      </p:sp>
-      <p:sp>
-        <p:nvSpPr>
-          <p:cNvPr id="10" name="TextBox 9"/>
-          <p:cNvSpPr txBox="1"/>
-          <p:nvPr/>
-        </p:nvSpPr>
-        <p:spPr>
-          <a:xfrm>
-            <a:off x="777240" y="2697480"/>
-            <a:ext cx="292608" cy="365760"/>
-          </a:xfrm>
-          <a:prstGeom prst="rect">
-            <a:avLst/>
-          </a:prstGeom>
-          <a:noFill/>
-        </p:spPr>
-        <p:txBody>
-          <a:bodyPr wrap="square" lIns="45720" rIns="45720" tIns="27432" bIns="27432" anchor="t">
-            <a:spAutoFit/>
-          </a:bodyPr>
-          <a:lstStyle/>
-          <a:p>
-            <a:pPr algn="l">
-              <a:defRPr sz="2200" b="1">
-                <a:solidFill>
-                  <a:srgbClr val="305D9C"/>
-                </a:solidFill>
-                <a:latin typeface="Aptos"/>
-              </a:defRPr>
-            </a:pPr>
-            <a:r>
-              <a:t>•</a:t>
-            </a:r>
-          </a:p>
-        </p:txBody>
-      </p:sp>
-      <p:sp>
-        <p:nvSpPr>
-          <p:cNvPr id="11" name="TextBox 10"/>
-          <p:cNvSpPr txBox="1"/>
-          <p:nvPr/>
-        </p:nvSpPr>
-        <p:spPr>
-          <a:xfrm>
-            <a:off x="1115568" y="2688336"/>
-            <a:ext cx="10241280" cy="384048"/>
-          </a:xfrm>
-          <a:prstGeom prst="rect">
-            <a:avLst/>
-          </a:prstGeom>
-          <a:noFill/>
-        </p:spPr>
-        <p:txBody>
-          <a:bodyPr wrap="square" lIns="45720" rIns="45720" tIns="27432" bIns="27432" anchor="t">
-            <a:spAutoFit/>
-          </a:bodyPr>
-          <a:lstStyle/>
-          <a:p>
-            <a:pPr algn="l">
-              <a:defRPr sz="1800" b="0">
-                <a:solidFill>
-                  <a:srgbClr val="23272F"/>
-                </a:solidFill>
-                <a:latin typeface="Aptos"/>
-              </a:defRPr>
-            </a:pPr>
-            <a:r>
-              <a:t>Read route parameters such as /students/1.</a:t>
-            </a:r>
-          </a:p>
-        </p:txBody>
-      </p:sp>
-      <p:sp>
-        <p:nvSpPr>
-          <p:cNvPr id="12" name="TextBox 11"/>
-          <p:cNvSpPr txBox="1"/>
-          <p:nvPr/>
-        </p:nvSpPr>
-        <p:spPr>
-          <a:xfrm>
-            <a:off x="777240" y="3337560"/>
-            <a:ext cx="292608" cy="365760"/>
-          </a:xfrm>
-          <a:prstGeom prst="rect">
-            <a:avLst/>
-          </a:prstGeom>
-          <a:noFill/>
-        </p:spPr>
-        <p:txBody>
-          <a:bodyPr wrap="square" lIns="45720" rIns="45720" tIns="27432" bIns="27432" anchor="t">
-            <a:spAutoFit/>
-          </a:bodyPr>
-          <a:lstStyle/>
-          <a:p>
-            <a:pPr algn="l">
-              <a:defRPr sz="2200" b="1">
-                <a:solidFill>
-                  <a:srgbClr val="305D9C"/>
-                </a:solidFill>
-                <a:latin typeface="Aptos"/>
-              </a:defRPr>
-            </a:pPr>
-            <a:r>
-              <a:t>•</a:t>
-            </a:r>
-          </a:p>
-        </p:txBody>
-      </p:sp>
-      <p:sp>
-        <p:nvSpPr>
-          <p:cNvPr id="13" name="TextBox 12"/>
-          <p:cNvSpPr txBox="1"/>
-          <p:nvPr/>
-        </p:nvSpPr>
-        <p:spPr>
-          <a:xfrm>
-            <a:off x="1115568" y="3328416"/>
-            <a:ext cx="10241280" cy="384048"/>
-          </a:xfrm>
-          <a:prstGeom prst="rect">
-            <a:avLst/>
-          </a:prstGeom>
-          <a:noFill/>
-        </p:spPr>
-        <p:txBody>
-          <a:bodyPr wrap="square" lIns="45720" rIns="45720" tIns="27432" bIns="27432" anchor="t">
-            <a:spAutoFit/>
-          </a:bodyPr>
-          <a:lstStyle/>
-          <a:p>
-            <a:pPr algn="l">
-              <a:defRPr sz="1800" b="0">
-                <a:solidFill>
-                  <a:srgbClr val="23272F"/>
-                </a:solidFill>
-                <a:latin typeface="Aptos"/>
-              </a:defRPr>
-            </a:pPr>
-            <a:r>
-              <a:t>Read query parameters such as /search?name=Rama.</a:t>
-            </a:r>
-          </a:p>
-        </p:txBody>
-      </p:sp>
-      <p:sp>
-        <p:nvSpPr>
-          <p:cNvPr id="14" name="TextBox 13"/>
-          <p:cNvSpPr txBox="1"/>
-          <p:nvPr/>
-        </p:nvSpPr>
-        <p:spPr>
-          <a:xfrm>
-            <a:off x="777240" y="3977640"/>
-            <a:ext cx="292608" cy="365760"/>
-          </a:xfrm>
-          <a:prstGeom prst="rect">
-            <a:avLst/>
-          </a:prstGeom>
-          <a:noFill/>
-        </p:spPr>
-        <p:txBody>
-          <a:bodyPr wrap="square" lIns="45720" rIns="45720" tIns="27432" bIns="27432" anchor="t">
-            <a:spAutoFit/>
-          </a:bodyPr>
-          <a:lstStyle/>
-          <a:p>
-            <a:pPr algn="l">
-              <a:defRPr sz="2200" b="1">
-                <a:solidFill>
-                  <a:srgbClr val="305D9C"/>
-                </a:solidFill>
-                <a:latin typeface="Aptos"/>
-              </a:defRPr>
-            </a:pPr>
-            <a:r>
-              <a:t>•</a:t>
-            </a:r>
-          </a:p>
-        </p:txBody>
-      </p:sp>
-      <p:sp>
-        <p:nvSpPr>
-          <p:cNvPr id="15" name="TextBox 14"/>
-          <p:cNvSpPr txBox="1"/>
-          <p:nvPr/>
-        </p:nvSpPr>
-        <p:spPr>
-          <a:xfrm>
-            <a:off x="1115568" y="3968496"/>
-            <a:ext cx="10241280" cy="384048"/>
-          </a:xfrm>
-          <a:prstGeom prst="rect">
-            <a:avLst/>
-          </a:prstGeom>
-          <a:noFill/>
-        </p:spPr>
-        <p:txBody>
-          <a:bodyPr wrap="square" lIns="45720" rIns="45720" tIns="27432" bIns="27432" anchor="t">
-            <a:spAutoFit/>
-          </a:bodyPr>
-          <a:lstStyle/>
-          <a:p>
-            <a:pPr algn="l">
-              <a:defRPr sz="1800" b="0">
-                <a:solidFill>
-                  <a:srgbClr val="23272F"/>
-                </a:solidFill>
-                <a:latin typeface="Aptos"/>
-              </a:defRPr>
-            </a:pPr>
-            <a:r>
-              <a:t>Build a URL dynamically.</a:t>
+              <a:t>See the experiment README for the exact syllabus task.</a:t>
             </a:r>
           </a:p>
         </p:txBody>
@@ -3911,7 +3586,7 @@
               </a:defRPr>
             </a:pPr>
             <a:r>
-              <a:t>Syllabus tasks</a:t>
+              <a:t>How it works</a:t>
             </a:r>
           </a:p>
         </p:txBody>
@@ -3959,16 +3634,40 @@
           </a:p>
         </p:txBody>
       </p:sp>
-      <p:sp>
-        <p:nvSpPr>
-          <p:cNvPr id="5" name="TextBox 4"/>
+      <p:pic>
+        <p:nvPicPr>
+          <p:cNvPr id="5" name="Picture 4" descr="01_workflow.png"/>
+          <p:cNvPicPr>
+            <a:picLocks noChangeAspect="1"/>
+          </p:cNvPicPr>
+          <p:nvPr/>
+        </p:nvPicPr>
+        <p:blipFill>
+          <a:blip r:embed="rId2"/>
+          <a:stretch>
+            <a:fillRect/>
+          </a:stretch>
+        </p:blipFill>
+        <p:spPr>
+          <a:xfrm>
+            <a:off x="594360" y="1280160"/>
+            <a:ext cx="10972800" cy="5074920"/>
+          </a:xfrm>
+          <a:prstGeom prst="rect">
+            <a:avLst/>
+          </a:prstGeom>
+        </p:spPr>
+      </p:pic>
+      <p:sp>
+        <p:nvSpPr>
+          <p:cNvPr id="6" name="TextBox 5"/>
           <p:cNvSpPr txBox="1"/>
           <p:nvPr/>
         </p:nvSpPr>
         <p:spPr>
           <a:xfrm>
-            <a:off x="1874519" y="356616"/>
-            <a:ext cx="9326880" cy="365760"/>
+            <a:off x="777240" y="6437376"/>
+            <a:ext cx="10607040" cy="228600"/>
           </a:xfrm>
           <a:prstGeom prst="rect">
             <a:avLst/>
@@ -3981,8 +3680,8 @@
           </a:bodyPr>
           <a:lstStyle/>
           <a:p>
-            <a:pPr algn="l">
-              <a:defRPr sz="1300" b="0">
+            <a:pPr algn="ctr">
+              <a:defRPr sz="1200" b="0">
                 <a:solidFill>
                   <a:srgbClr val="666E7A"/>
                 </a:solidFill>
@@ -3990,151 +3689,7 @@
               </a:defRPr>
             </a:pPr>
             <a:r>
-              <a:t>Part 2</a:t>
-            </a:r>
-          </a:p>
-        </p:txBody>
-      </p:sp>
-      <p:sp>
-        <p:nvSpPr>
-          <p:cNvPr id="6" name="TextBox 5"/>
-          <p:cNvSpPr txBox="1"/>
-          <p:nvPr/>
-        </p:nvSpPr>
-        <p:spPr>
-          <a:xfrm>
-            <a:off x="777240" y="1417320"/>
-            <a:ext cx="292608" cy="365760"/>
-          </a:xfrm>
-          <a:prstGeom prst="rect">
-            <a:avLst/>
-          </a:prstGeom>
-          <a:noFill/>
-        </p:spPr>
-        <p:txBody>
-          <a:bodyPr wrap="square" lIns="45720" rIns="45720" tIns="27432" bIns="27432" anchor="t">
-            <a:spAutoFit/>
-          </a:bodyPr>
-          <a:lstStyle/>
-          <a:p>
-            <a:pPr algn="l">
-              <a:defRPr sz="2200" b="1">
-                <a:solidFill>
-                  <a:srgbClr val="305D9C"/>
-                </a:solidFill>
-                <a:latin typeface="Aptos"/>
-              </a:defRPr>
-            </a:pPr>
-            <a:r>
-              <a:t>•</a:t>
-            </a:r>
-          </a:p>
-        </p:txBody>
-      </p:sp>
-      <p:sp>
-        <p:nvSpPr>
-          <p:cNvPr id="7" name="TextBox 6"/>
-          <p:cNvSpPr txBox="1"/>
-          <p:nvPr/>
-        </p:nvSpPr>
-        <p:spPr>
-          <a:xfrm>
-            <a:off x="1115568" y="1408176"/>
-            <a:ext cx="10241280" cy="384048"/>
-          </a:xfrm>
-          <a:prstGeom prst="rect">
-            <a:avLst/>
-          </a:prstGeom>
-          <a:noFill/>
-        </p:spPr>
-        <p:txBody>
-          <a:bodyPr wrap="square" lIns="45720" rIns="45720" tIns="27432" bIns="27432" anchor="t">
-            <a:spAutoFit/>
-          </a:bodyPr>
-          <a:lstStyle/>
-          <a:p>
-            <a:pPr algn="l">
-              <a:defRPr sz="1800" b="0">
-                <a:solidFill>
-                  <a:srgbClr val="23272F"/>
-                </a:solidFill>
-                <a:latin typeface="Aptos"/>
-              </a:defRPr>
-            </a:pPr>
-            <a:r>
-              <a:t>Create, read and delete student records in memory.</a:t>
-            </a:r>
-          </a:p>
-        </p:txBody>
-      </p:sp>
-      <p:sp>
-        <p:nvSpPr>
-          <p:cNvPr id="8" name="TextBox 7"/>
-          <p:cNvSpPr txBox="1"/>
-          <p:nvPr/>
-        </p:nvSpPr>
-        <p:spPr>
-          <a:xfrm>
-            <a:off x="777240" y="2057400"/>
-            <a:ext cx="292608" cy="365760"/>
-          </a:xfrm>
-          <a:prstGeom prst="rect">
-            <a:avLst/>
-          </a:prstGeom>
-          <a:noFill/>
-        </p:spPr>
-        <p:txBody>
-          <a:bodyPr wrap="square" lIns="45720" rIns="45720" tIns="27432" bIns="27432" anchor="t">
-            <a:spAutoFit/>
-          </a:bodyPr>
-          <a:lstStyle/>
-          <a:p>
-            <a:pPr algn="l">
-              <a:defRPr sz="2200" b="1">
-                <a:solidFill>
-                  <a:srgbClr val="305D9C"/>
-                </a:solidFill>
-                <a:latin typeface="Aptos"/>
-              </a:defRPr>
-            </a:pPr>
-            <a:r>
-              <a:t>•</a:t>
-            </a:r>
-          </a:p>
-        </p:txBody>
-      </p:sp>
-      <p:sp>
-        <p:nvSpPr>
-          <p:cNvPr id="9" name="TextBox 8"/>
-          <p:cNvSpPr txBox="1"/>
-          <p:nvPr/>
-        </p:nvSpPr>
-        <p:spPr>
-          <a:xfrm>
-            <a:off x="1115568" y="2048256"/>
-            <a:ext cx="10241280" cy="384048"/>
-          </a:xfrm>
-          <a:prstGeom prst="rect">
-            <a:avLst/>
-          </a:prstGeom>
-          <a:noFill/>
-        </p:spPr>
-        <p:txBody>
-          <a:bodyPr wrap="square" lIns="45720" rIns="45720" tIns="27432" bIns="27432" anchor="t">
-            <a:spAutoFit/>
-          </a:bodyPr>
-          <a:lstStyle/>
-          <a:p>
-            <a:pPr algn="l">
-              <a:defRPr sz="1800" b="0">
-                <a:solidFill>
-                  <a:srgbClr val="23272F"/>
-                </a:solidFill>
-                <a:latin typeface="Aptos"/>
-              </a:defRPr>
-            </a:pPr>
-            <a:r>
-              <a:t>app.js — complete ExpressJS example with comments and clear sections.</a:t>
+              <a:t>Input → processing → data/state → output</a:t>
             </a:r>
           </a:p>
         </p:txBody>
@@ -4231,7 +3786,7 @@
               </a:defRPr>
             </a:pPr>
             <a:r>
-              <a:t>How it works</a:t>
+              <a:t>Code pathway 1</a:t>
             </a:r>
           </a:p>
         </p:txBody>
@@ -4279,40 +3834,16 @@
           </a:p>
         </p:txBody>
       </p:sp>
-      <p:pic>
-        <p:nvPicPr>
-          <p:cNvPr id="5" name="Picture 4" descr="01_workflow.png"/>
-          <p:cNvPicPr>
-            <a:picLocks noChangeAspect="1"/>
-          </p:cNvPicPr>
-          <p:nvPr/>
-        </p:nvPicPr>
-        <p:blipFill>
-          <a:blip r:embed="rId2"/>
-          <a:stretch>
-            <a:fillRect/>
-          </a:stretch>
-        </p:blipFill>
-        <p:spPr>
-          <a:xfrm>
-            <a:off x="594360" y="1280160"/>
-            <a:ext cx="10972800" cy="5074920"/>
-          </a:xfrm>
-          <a:prstGeom prst="rect">
-            <a:avLst/>
-          </a:prstGeom>
-        </p:spPr>
-      </p:pic>
-      <p:sp>
-        <p:nvSpPr>
-          <p:cNvPr id="6" name="TextBox 5"/>
+      <p:sp>
+        <p:nvSpPr>
+          <p:cNvPr id="5" name="TextBox 4"/>
           <p:cNvSpPr txBox="1"/>
           <p:nvPr/>
         </p:nvSpPr>
         <p:spPr>
           <a:xfrm>
-            <a:off x="777240" y="6437376"/>
-            <a:ext cx="10607040" cy="228600"/>
+            <a:off x="1874519" y="356616"/>
+            <a:ext cx="9326880" cy="365760"/>
           </a:xfrm>
           <a:prstGeom prst="rect">
             <a:avLst/>
@@ -4325,8 +3856,8 @@
           </a:bodyPr>
           <a:lstStyle/>
           <a:p>
-            <a:pPr algn="ctr">
-              <a:defRPr sz="1200" b="0">
+            <a:pPr algn="l">
+              <a:defRPr sz="1300" b="0">
                 <a:solidFill>
                   <a:srgbClr val="666E7A"/>
                 </a:solidFill>
@@ -4334,7 +3865,124 @@
               </a:defRPr>
             </a:pPr>
             <a:r>
-              <a:t>Input → processing → data/state → output</a:t>
+              <a:t>app.js • lines 1–10</a:t>
+            </a:r>
+          </a:p>
+        </p:txBody>
+      </p:sp>
+      <p:sp>
+        <p:nvSpPr>
+          <p:cNvPr id="6" name="Rounded Rectangle 5"/>
+          <p:cNvSpPr/>
+          <p:nvPr/>
+        </p:nvSpPr>
+        <p:spPr>
+          <a:xfrm>
+            <a:off x="594360" y="1298448"/>
+            <a:ext cx="10972800" cy="5074920"/>
+          </a:xfrm>
+          <a:prstGeom prst="roundRect">
+            <a:avLst/>
+          </a:prstGeom>
+          <a:solidFill>
+            <a:srgbClr val="F8FAFC"/>
+          </a:solidFill>
+          <a:ln>
+            <a:solidFill>
+              <a:srgbClr val="DCE1E8"/>
+            </a:solidFill>
+          </a:ln>
+        </p:spPr>
+        <p:style>
+          <a:lnRef idx="1">
+            <a:schemeClr val="accent1"/>
+          </a:lnRef>
+          <a:fillRef idx="3">
+            <a:schemeClr val="accent1"/>
+          </a:fillRef>
+          <a:effectRef idx="2">
+            <a:schemeClr val="accent1"/>
+          </a:effectRef>
+          <a:fontRef idx="minor">
+            <a:schemeClr val="lt1"/>
+          </a:fontRef>
+        </p:style>
+        <p:txBody>
+          <a:bodyPr rtlCol="0" anchor="ctr"/>
+          <a:lstStyle/>
+          <a:p>
+            <a:pPr algn="ctr"/>
+          </a:p>
+        </p:txBody>
+      </p:sp>
+      <p:sp>
+        <p:nvSpPr>
+          <p:cNvPr id="7" name="TextBox 6"/>
+          <p:cNvSpPr txBox="1"/>
+          <p:nvPr/>
+        </p:nvSpPr>
+        <p:spPr>
+          <a:xfrm>
+            <a:off x="822960" y="1536192"/>
+            <a:ext cx="10515600" cy="4617720"/>
+          </a:xfrm>
+          <a:prstGeom prst="rect">
+            <a:avLst/>
+          </a:prstGeom>
+          <a:noFill/>
+        </p:spPr>
+        <p:txBody>
+          <a:bodyPr wrap="square" lIns="45720" rIns="45720" tIns="27432" bIns="27432" anchor="t">
+            <a:spAutoFit/>
+          </a:bodyPr>
+          <a:lstStyle/>
+          <a:p>
+            <a:pPr algn="l">
+              <a:defRPr sz="1250" b="0">
+                <a:solidFill>
+                  <a:srgbClr val="23272F"/>
+                </a:solidFill>
+                <a:latin typeface="DejaVu Sans Mono"/>
+              </a:defRPr>
+            </a:pPr>
+            <a:r>
+              <a:t>  1  /**</a:t>
+            </a:r>
+            <a:br/>
+            <a:r>
+              <a:t>  2   * Experiment 01: ExpressJS Routing, HTTP Methods and Middleware</a:t>
+            </a:r>
+            <a:br/>
+            <a:r>
+              <a:t>  3   *</a:t>
+            </a:r>
+            <a:br/>
+            <a:r>
+              <a:t>  4   * What it demonstrates:</a:t>
+            </a:r>
+            <a:br/>
+            <a:r>
+              <a:t>  5   * - Express server setup</a:t>
+            </a:r>
+            <a:br/>
+            <a:r>
+              <a:t>  6   * - Custom middleware</a:t>
+            </a:r>
+            <a:br/>
+            <a:r>
+              <a:t>  7   * - Route parameters and query parameters</a:t>
+            </a:r>
+            <a:br/>
+            <a:r>
+              <a:t>  8   * - URL building</a:t>
+            </a:r>
+            <a:br/>
+            <a:r>
+              <a:t>  9   * - GET, POST and DELETE methods</a:t>
+            </a:r>
+            <a:br/>
+            <a:r>
+              <a:t> 10   */</a:t>
             </a:r>
           </a:p>
         </p:txBody>
@@ -4431,7 +4079,7 @@
               </a:defRPr>
             </a:pPr>
             <a:r>
-              <a:t>Code pathway 1</a:t>
+              <a:t>Code pathway 2</a:t>
             </a:r>
           </a:p>
         </p:txBody>
@@ -4510,7 +4158,7 @@
               </a:defRPr>
             </a:pPr>
             <a:r>
-              <a:t>app.js • lines 1–10</a:t>
+              <a:t>app.js • lines 11–20</a:t>
             </a:r>
           </a:p>
         </p:txBody>
@@ -4591,43 +4239,43 @@
               </a:defRPr>
             </a:pPr>
             <a:r>
-              <a:t>  1  /**</a:t>
+              <a:t> 11  </a:t>
             </a:r>
             <a:br/>
             <a:r>
-              <a:t>  2   * Experiment 01: ExpressJS Routing, HTTP Methods and Middleware</a:t>
+              <a:t> 12  const express = require('express');</a:t>
             </a:r>
             <a:br/>
             <a:r>
-              <a:t>  3   *</a:t>
+              <a:t> 13  </a:t>
             </a:r>
             <a:br/>
             <a:r>
-              <a:t>  4   * What it demonstrates:</a:t>
+              <a:t> 14  const app = express();</a:t>
             </a:r>
             <a:br/>
             <a:r>
-              <a:t>  5   * - Express server setup</a:t>
+              <a:t> 15  const PORT = 3001;</a:t>
             </a:r>
             <a:br/>
             <a:r>
-              <a:t>  6   * - Custom middleware</a:t>
+              <a:t> 16  </a:t>
             </a:r>
             <a:br/>
             <a:r>
-              <a:t>  7   * - Route parameters and query parameters</a:t>
+              <a:t> 17  // ------------------------------------------------------------</a:t>
             </a:r>
             <a:br/>
             <a:r>
-              <a:t>  8   * - URL building</a:t>
+              <a:t> 18  // Middleware</a:t>
             </a:r>
             <a:br/>
             <a:r>
-              <a:t>  9   * - GET, POST and DELETE methods</a:t>
+              <a:t> 19  // ------------------------------------------------------------</a:t>
             </a:r>
             <a:br/>
             <a:r>
-              <a:t> 10   */</a:t>
+              <a:t> 20  </a:t>
             </a:r>
           </a:p>
         </p:txBody>
@@ -4724,7 +4372,7 @@
               </a:defRPr>
             </a:pPr>
             <a:r>
-              <a:t>Code pathway 2</a:t>
+              <a:t>Runtime walkthrough</a:t>
             </a:r>
           </a:p>
         </p:txBody>
@@ -4772,16 +4420,40 @@
           </a:p>
         </p:txBody>
       </p:sp>
-      <p:sp>
-        <p:nvSpPr>
-          <p:cNvPr id="5" name="TextBox 4"/>
+      <p:pic>
+        <p:nvPicPr>
+          <p:cNvPr id="5" name="Picture 4" descr="01_runtime.png"/>
+          <p:cNvPicPr>
+            <a:picLocks noChangeAspect="1"/>
+          </p:cNvPicPr>
+          <p:nvPr/>
+        </p:nvPicPr>
+        <p:blipFill>
+          <a:blip r:embed="rId2"/>
+          <a:stretch>
+            <a:fillRect/>
+          </a:stretch>
+        </p:blipFill>
+        <p:spPr>
+          <a:xfrm>
+            <a:off x="594360" y="1280160"/>
+            <a:ext cx="10972800" cy="5074920"/>
+          </a:xfrm>
+          <a:prstGeom prst="rect">
+            <a:avLst/>
+          </a:prstGeom>
+        </p:spPr>
+      </p:pic>
+      <p:sp>
+        <p:nvSpPr>
+          <p:cNvPr id="6" name="TextBox 5"/>
           <p:cNvSpPr txBox="1"/>
           <p:nvPr/>
         </p:nvSpPr>
         <p:spPr>
           <a:xfrm>
-            <a:off x="1874519" y="356616"/>
-            <a:ext cx="9326880" cy="365760"/>
+            <a:off x="777240" y="6437376"/>
+            <a:ext cx="10607040" cy="228600"/>
           </a:xfrm>
           <a:prstGeom prst="rect">
             <a:avLst/>
@@ -4794,8 +4466,8 @@
           </a:bodyPr>
           <a:lstStyle/>
           <a:p>
-            <a:pPr algn="l">
-              <a:defRPr sz="1300" b="0">
+            <a:pPr algn="ctr">
+              <a:defRPr sz="1200" b="0">
                 <a:solidFill>
                   <a:srgbClr val="666E7A"/>
                 </a:solidFill>
@@ -4803,124 +4475,7 @@
               </a:defRPr>
             </a:pPr>
             <a:r>
-              <a:t>app.js • lines 11–20</a:t>
-            </a:r>
-          </a:p>
-        </p:txBody>
-      </p:sp>
-      <p:sp>
-        <p:nvSpPr>
-          <p:cNvPr id="6" name="Rounded Rectangle 5"/>
-          <p:cNvSpPr/>
-          <p:nvPr/>
-        </p:nvSpPr>
-        <p:spPr>
-          <a:xfrm>
-            <a:off x="594360" y="1298448"/>
-            <a:ext cx="10972800" cy="5074920"/>
-          </a:xfrm>
-          <a:prstGeom prst="roundRect">
-            <a:avLst/>
-          </a:prstGeom>
-          <a:solidFill>
-            <a:srgbClr val="F8FAFC"/>
-          </a:solidFill>
-          <a:ln>
-            <a:solidFill>
-              <a:srgbClr val="DCE1E8"/>
-            </a:solidFill>
-          </a:ln>
-        </p:spPr>
-        <p:style>
-          <a:lnRef idx="1">
-            <a:schemeClr val="accent1"/>
-          </a:lnRef>
-          <a:fillRef idx="3">
-            <a:schemeClr val="accent1"/>
-          </a:fillRef>
-          <a:effectRef idx="2">
-            <a:schemeClr val="accent1"/>
-          </a:effectRef>
-          <a:fontRef idx="minor">
-            <a:schemeClr val="lt1"/>
-          </a:fontRef>
-        </p:style>
-        <p:txBody>
-          <a:bodyPr rtlCol="0" anchor="ctr"/>
-          <a:lstStyle/>
-          <a:p>
-            <a:pPr algn="ctr"/>
-          </a:p>
-        </p:txBody>
-      </p:sp>
-      <p:sp>
-        <p:nvSpPr>
-          <p:cNvPr id="7" name="TextBox 6"/>
-          <p:cNvSpPr txBox="1"/>
-          <p:nvPr/>
-        </p:nvSpPr>
-        <p:spPr>
-          <a:xfrm>
-            <a:off x="822960" y="1536192"/>
-            <a:ext cx="10515600" cy="4617720"/>
-          </a:xfrm>
-          <a:prstGeom prst="rect">
-            <a:avLst/>
-          </a:prstGeom>
-          <a:noFill/>
-        </p:spPr>
-        <p:txBody>
-          <a:bodyPr wrap="square" lIns="45720" rIns="45720" tIns="27432" bIns="27432" anchor="t">
-            <a:spAutoFit/>
-          </a:bodyPr>
-          <a:lstStyle/>
-          <a:p>
-            <a:pPr algn="l">
-              <a:defRPr sz="1250" b="0">
-                <a:solidFill>
-                  <a:srgbClr val="23272F"/>
-                </a:solidFill>
-                <a:latin typeface="DejaVu Sans Mono"/>
-              </a:defRPr>
-            </a:pPr>
-            <a:r>
-              <a:t> 11  </a:t>
-            </a:r>
-            <a:br/>
-            <a:r>
-              <a:t> 12  const express = require('express');</a:t>
-            </a:r>
-            <a:br/>
-            <a:r>
-              <a:t> 13  </a:t>
-            </a:r>
-            <a:br/>
-            <a:r>
-              <a:t> 14  const app = express();</a:t>
-            </a:r>
-            <a:br/>
-            <a:r>
-              <a:t> 15  const PORT = 3001;</a:t>
-            </a:r>
-            <a:br/>
-            <a:r>
-              <a:t> 16  </a:t>
-            </a:r>
-            <a:br/>
-            <a:r>
-              <a:t> 17  // ------------------------------------------------------------</a:t>
-            </a:r>
-            <a:br/>
-            <a:r>
-              <a:t> 18  // Middleware</a:t>
-            </a:r>
-            <a:br/>
-            <a:r>
-              <a:t> 19  // ------------------------------------------------------------</a:t>
-            </a:r>
-            <a:br/>
-            <a:r>
-              <a:t> 20  </a:t>
+              <a:t>Start → enter input → execute → observe output</a:t>
             </a:r>
           </a:p>
         </p:txBody>
@@ -5017,7 +4572,7 @@
               </a:defRPr>
             </a:pPr>
             <a:r>
-              <a:t>Runtime walkthrough</a:t>
+              <a:t>Expected result</a:t>
             </a:r>
           </a:p>
         </p:txBody>
@@ -5065,40 +4620,16 @@
           </a:p>
         </p:txBody>
       </p:sp>
-      <p:pic>
-        <p:nvPicPr>
-          <p:cNvPr id="5" name="Picture 4" descr="01_runtime.png"/>
-          <p:cNvPicPr>
-            <a:picLocks noChangeAspect="1"/>
-          </p:cNvPicPr>
-          <p:nvPr/>
-        </p:nvPicPr>
-        <p:blipFill>
-          <a:blip r:embed="rId2"/>
-          <a:stretch>
-            <a:fillRect/>
-          </a:stretch>
-        </p:blipFill>
-        <p:spPr>
-          <a:xfrm>
-            <a:off x="594360" y="1280160"/>
-            <a:ext cx="10972800" cy="5074920"/>
-          </a:xfrm>
-          <a:prstGeom prst="rect">
-            <a:avLst/>
-          </a:prstGeom>
-        </p:spPr>
-      </p:pic>
-      <p:sp>
-        <p:nvSpPr>
-          <p:cNvPr id="6" name="TextBox 5"/>
+      <p:sp>
+        <p:nvSpPr>
+          <p:cNvPr id="5" name="TextBox 4"/>
           <p:cNvSpPr txBox="1"/>
           <p:nvPr/>
         </p:nvSpPr>
         <p:spPr>
           <a:xfrm>
-            <a:off x="777240" y="6437376"/>
-            <a:ext cx="10607040" cy="228600"/>
+            <a:off x="1874519" y="356616"/>
+            <a:ext cx="9326880" cy="365760"/>
           </a:xfrm>
           <a:prstGeom prst="rect">
             <a:avLst/>
@@ -5111,8 +4642,8 @@
           </a:bodyPr>
           <a:lstStyle/>
           <a:p>
-            <a:pPr algn="ctr">
-              <a:defRPr sz="1200" b="0">
+            <a:pPr algn="l">
+              <a:defRPr sz="1300" b="0">
                 <a:solidFill>
                   <a:srgbClr val="666E7A"/>
                 </a:solidFill>
@@ -5120,48 +4651,32 @@
               </a:defRPr>
             </a:pPr>
             <a:r>
-              <a:t>Start → enter input → execute → observe output</a:t>
-            </a:r>
-          </a:p>
-        </p:txBody>
-      </p:sp>
-    </p:spTree>
-  </p:cSld>
-  <p:clrMapOvr>
-    <a:masterClrMapping/>
-  </p:clrMapOvr>
-</p:sld>
-</file>
-
-<file path=ppt/slides/slide8.xml><?xml version="1.0" encoding="utf-8"?>
-<p:sld xmlns:a="http://schemas.openxmlformats.org/drawingml/2006/main" xmlns:p="http://schemas.openxmlformats.org/presentationml/2006/main" xmlns:r="http://schemas.openxmlformats.org/officeDocument/2006/relationships">
-  <p:cSld>
-    <p:spTree>
-      <p:nvGrpSpPr>
-        <p:cNvPr id="1" name=""/>
-        <p:cNvGrpSpPr/>
-        <p:nvPr/>
-      </p:nvGrpSpPr>
-      <p:grpSpPr/>
-      <p:sp>
-        <p:nvSpPr>
-          <p:cNvPr id="2" name="Rectangle 1"/>
+              <a:t>Experiment 01 — ExpressJS Routing, HTTP Methods and Middleware</a:t>
+            </a:r>
+          </a:p>
+        </p:txBody>
+      </p:sp>
+      <p:sp>
+        <p:nvSpPr>
+          <p:cNvPr id="6" name="Rounded Rectangle 5"/>
           <p:cNvSpPr/>
           <p:nvPr/>
         </p:nvSpPr>
         <p:spPr>
           <a:xfrm>
-            <a:off x="0" y="0"/>
-            <a:ext cx="12191695" cy="6858000"/>
-          </a:xfrm>
-          <a:prstGeom prst="rect">
+            <a:off x="685800" y="1417320"/>
+            <a:ext cx="3337560" cy="1920240"/>
+          </a:xfrm>
+          <a:prstGeom prst="roundRect">
             <a:avLst/>
           </a:prstGeom>
           <a:solidFill>
-            <a:srgbClr val="FFFFFF"/>
+            <a:srgbClr val="F4F6F9"/>
           </a:solidFill>
           <a:ln>
-            <a:noFill/>
+            <a:solidFill>
+              <a:srgbClr val="DCE1E8"/>
+            </a:solidFill>
           </a:ln>
         </p:spPr>
         <p:style>
@@ -5188,14 +4703,14 @@
       </p:sp>
       <p:sp>
         <p:nvSpPr>
-          <p:cNvPr id="3" name="TextBox 2"/>
+          <p:cNvPr id="7" name="TextBox 6"/>
           <p:cNvSpPr txBox="1"/>
           <p:nvPr/>
         </p:nvSpPr>
         <p:spPr>
           <a:xfrm>
-            <a:off x="594360" y="274320"/>
-            <a:ext cx="10927080" cy="621792"/>
+            <a:off x="886968" y="1581912"/>
+            <a:ext cx="2935224" cy="365760"/>
           </a:xfrm>
           <a:prstGeom prst="rect">
             <a:avLst/>
@@ -5203,44 +4718,82 @@
           <a:noFill/>
         </p:spPr>
         <p:txBody>
-          <a:bodyPr wrap="square" lIns="45720" rIns="45720" tIns="27432" bIns="27432" anchor="ctr">
+          <a:bodyPr wrap="square" lIns="45720" rIns="45720" tIns="27432" bIns="27432" anchor="t">
             <a:spAutoFit/>
           </a:bodyPr>
           <a:lstStyle/>
           <a:p>
             <a:pPr algn="l">
-              <a:defRPr sz="2700" b="1">
-                <a:solidFill>
-                  <a:srgbClr val="1B2B4B"/>
+              <a:defRPr sz="1800" b="1">
+                <a:solidFill>
+                  <a:srgbClr val="305D9C"/>
                 </a:solidFill>
                 <a:latin typeface="Aptos"/>
               </a:defRPr>
             </a:pPr>
             <a:r>
-              <a:t>Expected result</a:t>
-            </a:r>
-          </a:p>
-        </p:txBody>
-      </p:sp>
-      <p:sp>
-        <p:nvSpPr>
-          <p:cNvPr id="4" name="Rectangle 3"/>
+              <a:t>INPUT</a:t>
+            </a:r>
+          </a:p>
+        </p:txBody>
+      </p:sp>
+      <p:sp>
+        <p:nvSpPr>
+          <p:cNvPr id="8" name="TextBox 7"/>
+          <p:cNvSpPr txBox="1"/>
+          <p:nvPr/>
+        </p:nvSpPr>
+        <p:spPr>
+          <a:xfrm>
+            <a:off x="886968" y="2039112"/>
+            <a:ext cx="2935224" cy="1115568"/>
+          </a:xfrm>
+          <a:prstGeom prst="rect">
+            <a:avLst/>
+          </a:prstGeom>
+          <a:noFill/>
+        </p:spPr>
+        <p:txBody>
+          <a:bodyPr wrap="square" lIns="45720" rIns="45720" tIns="27432" bIns="27432" anchor="t">
+            <a:spAutoFit/>
+          </a:bodyPr>
+          <a:lstStyle/>
+          <a:p>
+            <a:pPr algn="l">
+              <a:defRPr sz="1550" b="0">
+                <a:solidFill>
+                  <a:srgbClr val="23272F"/>
+                </a:solidFill>
+                <a:latin typeface="Aptos"/>
+              </a:defRPr>
+            </a:pPr>
+            <a:r>
+              <a:t>Enter the sample values or open the required page / route.</a:t>
+            </a:r>
+          </a:p>
+        </p:txBody>
+      </p:sp>
+      <p:sp>
+        <p:nvSpPr>
+          <p:cNvPr id="9" name="Rounded Rectangle 8"/>
           <p:cNvSpPr/>
           <p:nvPr/>
         </p:nvSpPr>
         <p:spPr>
           <a:xfrm>
-            <a:off x="594360" y="950976"/>
-            <a:ext cx="1143000" cy="54864"/>
-          </a:xfrm>
-          <a:prstGeom prst="rect">
+            <a:off x="4434840" y="1417320"/>
+            <a:ext cx="3337560" cy="1920240"/>
+          </a:xfrm>
+          <a:prstGeom prst="roundRect">
             <a:avLst/>
           </a:prstGeom>
           <a:solidFill>
-            <a:srgbClr val="305D9C"/>
+            <a:srgbClr val="F4F6F9"/>
           </a:solidFill>
           <a:ln>
-            <a:noFill/>
+            <a:solidFill>
+              <a:srgbClr val="DCE1E8"/>
+            </a:solidFill>
           </a:ln>
         </p:spPr>
         <p:style>
@@ -5267,14 +4820,14 @@
       </p:sp>
       <p:sp>
         <p:nvSpPr>
-          <p:cNvPr id="5" name="TextBox 4"/>
+          <p:cNvPr id="10" name="TextBox 9"/>
           <p:cNvSpPr txBox="1"/>
           <p:nvPr/>
         </p:nvSpPr>
         <p:spPr>
           <a:xfrm>
-            <a:off x="1874519" y="356616"/>
-            <a:ext cx="9326880" cy="365760"/>
+            <a:off x="4636007" y="1581912"/>
+            <a:ext cx="2935224" cy="365760"/>
           </a:xfrm>
           <a:prstGeom prst="rect">
             <a:avLst/>
@@ -5288,28 +4841,64 @@
           <a:lstStyle/>
           <a:p>
             <a:pPr algn="l">
-              <a:defRPr sz="1300" b="0">
-                <a:solidFill>
-                  <a:srgbClr val="666E7A"/>
+              <a:defRPr sz="1800" b="1">
+                <a:solidFill>
+                  <a:srgbClr val="2A7A59"/>
                 </a:solidFill>
                 <a:latin typeface="Aptos"/>
               </a:defRPr>
             </a:pPr>
             <a:r>
-              <a:t>Experiment 01 — ExpressJS Routing, HTTP Methods and Middleware</a:t>
-            </a:r>
-          </a:p>
-        </p:txBody>
-      </p:sp>
-      <p:sp>
-        <p:nvSpPr>
-          <p:cNvPr id="6" name="Rounded Rectangle 5"/>
+              <a:t>PROCESS</a:t>
+            </a:r>
+          </a:p>
+        </p:txBody>
+      </p:sp>
+      <p:sp>
+        <p:nvSpPr>
+          <p:cNvPr id="11" name="TextBox 10"/>
+          <p:cNvSpPr txBox="1"/>
+          <p:nvPr/>
+        </p:nvSpPr>
+        <p:spPr>
+          <a:xfrm>
+            <a:off x="4636007" y="2039112"/>
+            <a:ext cx="2935224" cy="1115568"/>
+          </a:xfrm>
+          <a:prstGeom prst="rect">
+            <a:avLst/>
+          </a:prstGeom>
+          <a:noFill/>
+        </p:spPr>
+        <p:txBody>
+          <a:bodyPr wrap="square" lIns="45720" rIns="45720" tIns="27432" bIns="27432" anchor="t">
+            <a:spAutoFit/>
+          </a:bodyPr>
+          <a:lstStyle/>
+          <a:p>
+            <a:pPr algn="l">
+              <a:defRPr sz="1550" b="0">
+                <a:solidFill>
+                  <a:srgbClr val="23272F"/>
+                </a:solidFill>
+                <a:latin typeface="Aptos"/>
+              </a:defRPr>
+            </a:pPr>
+            <a:r>
+              <a:t>The Express route, React component, hook, or MongoDB command performs the task.</a:t>
+            </a:r>
+          </a:p>
+        </p:txBody>
+      </p:sp>
+      <p:sp>
+        <p:nvSpPr>
+          <p:cNvPr id="12" name="Rounded Rectangle 11"/>
           <p:cNvSpPr/>
           <p:nvPr/>
         </p:nvSpPr>
         <p:spPr>
           <a:xfrm>
-            <a:off x="685800" y="1417320"/>
+            <a:off x="8183879" y="1417320"/>
             <a:ext cx="3337560" cy="1920240"/>
           </a:xfrm>
           <a:prstGeom prst="roundRect">
@@ -5348,240 +4937,6 @@
       </p:sp>
       <p:sp>
         <p:nvSpPr>
-          <p:cNvPr id="7" name="TextBox 6"/>
-          <p:cNvSpPr txBox="1"/>
-          <p:nvPr/>
-        </p:nvSpPr>
-        <p:spPr>
-          <a:xfrm>
-            <a:off x="886968" y="1581912"/>
-            <a:ext cx="2935224" cy="365760"/>
-          </a:xfrm>
-          <a:prstGeom prst="rect">
-            <a:avLst/>
-          </a:prstGeom>
-          <a:noFill/>
-        </p:spPr>
-        <p:txBody>
-          <a:bodyPr wrap="square" lIns="45720" rIns="45720" tIns="27432" bIns="27432" anchor="t">
-            <a:spAutoFit/>
-          </a:bodyPr>
-          <a:lstStyle/>
-          <a:p>
-            <a:pPr algn="l">
-              <a:defRPr sz="1800" b="1">
-                <a:solidFill>
-                  <a:srgbClr val="305D9C"/>
-                </a:solidFill>
-                <a:latin typeface="Aptos"/>
-              </a:defRPr>
-            </a:pPr>
-            <a:r>
-              <a:t>INPUT</a:t>
-            </a:r>
-          </a:p>
-        </p:txBody>
-      </p:sp>
-      <p:sp>
-        <p:nvSpPr>
-          <p:cNvPr id="8" name="TextBox 7"/>
-          <p:cNvSpPr txBox="1"/>
-          <p:nvPr/>
-        </p:nvSpPr>
-        <p:spPr>
-          <a:xfrm>
-            <a:off x="886968" y="2039112"/>
-            <a:ext cx="2935224" cy="1115568"/>
-          </a:xfrm>
-          <a:prstGeom prst="rect">
-            <a:avLst/>
-          </a:prstGeom>
-          <a:noFill/>
-        </p:spPr>
-        <p:txBody>
-          <a:bodyPr wrap="square" lIns="45720" rIns="45720" tIns="27432" bIns="27432" anchor="t">
-            <a:spAutoFit/>
-          </a:bodyPr>
-          <a:lstStyle/>
-          <a:p>
-            <a:pPr algn="l">
-              <a:defRPr sz="1550" b="0">
-                <a:solidFill>
-                  <a:srgbClr val="23272F"/>
-                </a:solidFill>
-                <a:latin typeface="Aptos"/>
-              </a:defRPr>
-            </a:pPr>
-            <a:r>
-              <a:t>Enter the sample values or open the required page / route.</a:t>
-            </a:r>
-          </a:p>
-        </p:txBody>
-      </p:sp>
-      <p:sp>
-        <p:nvSpPr>
-          <p:cNvPr id="9" name="Rounded Rectangle 8"/>
-          <p:cNvSpPr/>
-          <p:nvPr/>
-        </p:nvSpPr>
-        <p:spPr>
-          <a:xfrm>
-            <a:off x="4434840" y="1417320"/>
-            <a:ext cx="3337560" cy="1920240"/>
-          </a:xfrm>
-          <a:prstGeom prst="roundRect">
-            <a:avLst/>
-          </a:prstGeom>
-          <a:solidFill>
-            <a:srgbClr val="F4F6F9"/>
-          </a:solidFill>
-          <a:ln>
-            <a:solidFill>
-              <a:srgbClr val="DCE1E8"/>
-            </a:solidFill>
-          </a:ln>
-        </p:spPr>
-        <p:style>
-          <a:lnRef idx="1">
-            <a:schemeClr val="accent1"/>
-          </a:lnRef>
-          <a:fillRef idx="3">
-            <a:schemeClr val="accent1"/>
-          </a:fillRef>
-          <a:effectRef idx="2">
-            <a:schemeClr val="accent1"/>
-          </a:effectRef>
-          <a:fontRef idx="minor">
-            <a:schemeClr val="lt1"/>
-          </a:fontRef>
-        </p:style>
-        <p:txBody>
-          <a:bodyPr rtlCol="0" anchor="ctr"/>
-          <a:lstStyle/>
-          <a:p>
-            <a:pPr algn="ctr"/>
-          </a:p>
-        </p:txBody>
-      </p:sp>
-      <p:sp>
-        <p:nvSpPr>
-          <p:cNvPr id="10" name="TextBox 9"/>
-          <p:cNvSpPr txBox="1"/>
-          <p:nvPr/>
-        </p:nvSpPr>
-        <p:spPr>
-          <a:xfrm>
-            <a:off x="4636007" y="1581912"/>
-            <a:ext cx="2935224" cy="365760"/>
-          </a:xfrm>
-          <a:prstGeom prst="rect">
-            <a:avLst/>
-          </a:prstGeom>
-          <a:noFill/>
-        </p:spPr>
-        <p:txBody>
-          <a:bodyPr wrap="square" lIns="45720" rIns="45720" tIns="27432" bIns="27432" anchor="t">
-            <a:spAutoFit/>
-          </a:bodyPr>
-          <a:lstStyle/>
-          <a:p>
-            <a:pPr algn="l">
-              <a:defRPr sz="1800" b="1">
-                <a:solidFill>
-                  <a:srgbClr val="2A7A59"/>
-                </a:solidFill>
-                <a:latin typeface="Aptos"/>
-              </a:defRPr>
-            </a:pPr>
-            <a:r>
-              <a:t>PROCESS</a:t>
-            </a:r>
-          </a:p>
-        </p:txBody>
-      </p:sp>
-      <p:sp>
-        <p:nvSpPr>
-          <p:cNvPr id="11" name="TextBox 10"/>
-          <p:cNvSpPr txBox="1"/>
-          <p:nvPr/>
-        </p:nvSpPr>
-        <p:spPr>
-          <a:xfrm>
-            <a:off x="4636007" y="2039112"/>
-            <a:ext cx="2935224" cy="1115568"/>
-          </a:xfrm>
-          <a:prstGeom prst="rect">
-            <a:avLst/>
-          </a:prstGeom>
-          <a:noFill/>
-        </p:spPr>
-        <p:txBody>
-          <a:bodyPr wrap="square" lIns="45720" rIns="45720" tIns="27432" bIns="27432" anchor="t">
-            <a:spAutoFit/>
-          </a:bodyPr>
-          <a:lstStyle/>
-          <a:p>
-            <a:pPr algn="l">
-              <a:defRPr sz="1550" b="0">
-                <a:solidFill>
-                  <a:srgbClr val="23272F"/>
-                </a:solidFill>
-                <a:latin typeface="Aptos"/>
-              </a:defRPr>
-            </a:pPr>
-            <a:r>
-              <a:t>The Express route, React component, hook, or MongoDB command performs the task.</a:t>
-            </a:r>
-          </a:p>
-        </p:txBody>
-      </p:sp>
-      <p:sp>
-        <p:nvSpPr>
-          <p:cNvPr id="12" name="Rounded Rectangle 11"/>
-          <p:cNvSpPr/>
-          <p:nvPr/>
-        </p:nvSpPr>
-        <p:spPr>
-          <a:xfrm>
-            <a:off x="8183879" y="1417320"/>
-            <a:ext cx="3337560" cy="1920240"/>
-          </a:xfrm>
-          <a:prstGeom prst="roundRect">
-            <a:avLst/>
-          </a:prstGeom>
-          <a:solidFill>
-            <a:srgbClr val="F4F6F9"/>
-          </a:solidFill>
-          <a:ln>
-            <a:solidFill>
-              <a:srgbClr val="DCE1E8"/>
-            </a:solidFill>
-          </a:ln>
-        </p:spPr>
-        <p:style>
-          <a:lnRef idx="1">
-            <a:schemeClr val="accent1"/>
-          </a:lnRef>
-          <a:fillRef idx="3">
-            <a:schemeClr val="accent1"/>
-          </a:fillRef>
-          <a:effectRef idx="2">
-            <a:schemeClr val="accent1"/>
-          </a:effectRef>
-          <a:fontRef idx="minor">
-            <a:schemeClr val="lt1"/>
-          </a:fontRef>
-        </p:style>
-        <p:txBody>
-          <a:bodyPr rtlCol="0" anchor="ctr"/>
-          <a:lstStyle/>
-          <a:p>
-            <a:pPr algn="ctr"/>
-          </a:p>
-        </p:txBody>
-      </p:sp>
-      <p:sp>
-        <p:nvSpPr>
           <p:cNvPr id="13" name="TextBox 12"/>
           <p:cNvSpPr txBox="1"/>
           <p:nvPr/>
@@ -5912,7 +5267,7 @@
 </p:sld>
 </file>
 
-<file path=ppt/slides/slide9.xml><?xml version="1.0" encoding="utf-8"?>
+<file path=ppt/slides/slide8.xml><?xml version="1.0" encoding="utf-8"?>
 <p:sld xmlns:a="http://schemas.openxmlformats.org/drawingml/2006/main" xmlns:p="http://schemas.openxmlformats.org/presentationml/2006/main" xmlns:r="http://schemas.openxmlformats.org/officeDocument/2006/relationships">
   <p:cSld>
     <p:spTree>
